--- a/FloodView_Architecture_Deck.pptx
+++ b/FloodView_Architecture_Deck.pptx
@@ -3162,7 +3162,7 @@
                 </a:solidFill>
                 <a:latin typeface="Calibri"/>
               </a:rPr>
-              <a:t>JalRaksha</a:t>
+              <a:t>FloodView</a:t>
             </a:r>
           </a:p>
         </p:txBody>
@@ -6068,7 +6068,7 @@
                 </a:solidFill>
                 <a:latin typeface="Calibri"/>
               </a:rPr>
-              <a:t>JalRaksha</a:t>
+              <a:t>FloodView</a:t>
             </a:r>
           </a:p>
         </p:txBody>
@@ -8493,7 +8493,7 @@
                 </a:solidFill>
                 <a:latin typeface="Calibri"/>
               </a:rPr>
-              <a:t>The framing matters as much as the software. JalRaksha is a first-pass screening instrument: it tells a state which of its dams deserve a full surveyed study, and in what order. It does not replace that study, and the reports say so on their own face rather than in a footnote.</a:t>
+              <a:t>The framing matters as much as the software. FloodView is a first-pass screening instrument: it tells a state which of its dams deserve a full surveyed study, and in what order. It does not replace that study, and the reports say so on their own face rather than in a footnote.</a:t>
             </a:r>
           </a:p>
         </p:txBody>
@@ -8709,7 +8709,7 @@
                 </a:solidFill>
                 <a:latin typeface="Calibri"/>
               </a:rPr>
-              <a:t>JalRaksha</a:t>
+              <a:t>FloodView</a:t>
             </a:r>
           </a:p>
         </p:txBody>
@@ -9572,7 +9572,7 @@
                 </a:solidFill>
                 <a:latin typeface="Calibri"/>
               </a:rPr>
-              <a:t>▪ JalRaksha: four inputs, free data, a full run in 47 seconds</a:t>
+              <a:t>▪ FloodView: four inputs, free data, a full run in 47 seconds</a:t>
             </a:r>
           </a:p>
           <a:p>
@@ -11755,7 +11755,7 @@
                 </a:solidFill>
                 <a:latin typeface="Calibri"/>
               </a:rPr>
-              <a:t>JalRaksha</a:t>
+              <a:t>FloodView</a:t>
             </a:r>
           </a:p>
         </p:txBody>
@@ -15589,7 +15589,7 @@
                 </a:solidFill>
                 <a:latin typeface="Calibri"/>
               </a:rPr>
-              <a:t>JalRaksha</a:t>
+              <a:t>FloodView</a:t>
             </a:r>
           </a:p>
         </p:txBody>
@@ -19232,7 +19232,7 @@
                 </a:solidFill>
                 <a:latin typeface="Calibri"/>
               </a:rPr>
-              <a:t>JalRaksha</a:t>
+              <a:t>FloodView</a:t>
             </a:r>
           </a:p>
         </p:txBody>
@@ -20257,7 +20257,7 @@
                 </a:solidFill>
                 <a:latin typeface="Calibri"/>
               </a:rPr>
-              <a:t>EVERYTHING INSIDE THIS BOX IS JALRAKSHA</a:t>
+              <a:t>EVERYTHING INSIDE THIS BOX IS FLOODVIEW</a:t>
             </a:r>
           </a:p>
         </p:txBody>
@@ -21763,7 +21763,7 @@
                 </a:solidFill>
                 <a:latin typeface="Calibri"/>
               </a:rPr>
-              <a:t>JalRaksha</a:t>
+              <a:t>FloodView</a:t>
             </a:r>
           </a:p>
         </p:txBody>
@@ -22140,7 +22140,7 @@
                 </a:solidFill>
                 <a:latin typeface="Calibri"/>
               </a:rPr>
-              <a:t>JALRAKSHA · THE WHOLE SYSTEM</a:t>
+              <a:t>FLOODVIEW · THE WHOLE SYSTEM</a:t>
             </a:r>
           </a:p>
         </p:txBody>
@@ -25067,7 +25067,7 @@
                 </a:solidFill>
                 <a:latin typeface="Calibri"/>
               </a:rPr>
-              <a:t>JalRaksha</a:t>
+              <a:t>FloodView</a:t>
             </a:r>
           </a:p>
         </p:txBody>
@@ -27593,7 +27593,7 @@
                 </a:solidFill>
                 <a:latin typeface="Calibri"/>
               </a:rPr>
-              <a:t>JalRaksha</a:t>
+              <a:t>FloodView</a:t>
             </a:r>
           </a:p>
         </p:txBody>
@@ -28009,7 +28009,7 @@
                 </a:solidFill>
                 <a:latin typeface="Calibri"/>
               </a:rPr>
-              <a:t>JalRaksha completes the same screening in </a:t>
+              <a:t>FloodView completes the same screening in </a:t>
             </a:r>
             <a:r>
               <a:rPr sz="900" b="1" i="0">
@@ -29011,7 +29011,7 @@
                 </a:solidFill>
                 <a:latin typeface="Calibri"/>
               </a:rPr>
-              <a:t>How JalRaksha does it</a:t>
+              <a:t>How FloodView does it</a:t>
             </a:r>
           </a:p>
         </p:txBody>
@@ -30379,7 +30379,7 @@
                 </a:solidFill>
                 <a:latin typeface="Calibri"/>
               </a:rPr>
-              <a:t>JalRaksha</a:t>
+              <a:t>FloodView</a:t>
             </a:r>
           </a:p>
         </p:txBody>
@@ -32184,7 +32184,7 @@
                 </a:solidFill>
                 <a:latin typeface="Calibri"/>
               </a:rPr>
-              <a:t>JalRaksha</a:t>
+              <a:t>FloodView</a:t>
             </a:r>
           </a:p>
         </p:txBody>
